--- a/公示/相关PPT/2608：计研五三新生班会-杜晋华.pptx
+++ b/公示/相关PPT/2608：计研五三新生班会-杜晋华.pptx
@@ -5448,7 +5448,7 @@
                 <a:ea typeface="Microsoft YaHei" pitchFamily="34" charset="-122"/>
                 <a:cs typeface="Microsoft YaHei" pitchFamily="34" charset="-120"/>
               </a:rPr>
-              <a:t>齐韵嘉  </a:t>
+              <a:t>夏箫  </a:t>
             </a:r>
             <a:pPr indent="0" marL="0">
               <a:spcAft>
@@ -5485,7 +5485,7 @@
                 <a:ea typeface="Microsoft YaHei" pitchFamily="34" charset="-122"/>
                 <a:cs typeface="Microsoft YaHei" pitchFamily="34" charset="-120"/>
               </a:rPr>
-              <a:t>夏箫  </a:t>
+              <a:t>齐韵嘉  </a:t>
             </a:r>
             <a:pPr indent="0" marL="0">
               <a:spcAft>
@@ -8592,7 +8592,7 @@
                           <a:ea typeface="Microsoft YaHei" pitchFamily="34" charset="-122"/>
                           <a:cs typeface="Microsoft YaHei" pitchFamily="34" charset="-120"/>
                         </a:rPr>
-                        <a:t>齐韵嘉</a:t>
+                        <a:t>夏箫</a:t>
                       </a:r>
                       <a:endParaRPr lang="en-US" sz="1100" dirty="0">
                         <a:latin typeface="Microsoft YaHei" charset="0"/>
@@ -8798,7 +8798,7 @@
                           <a:ea typeface="Microsoft YaHei" pitchFamily="34" charset="-122"/>
                           <a:cs typeface="Microsoft YaHei" pitchFamily="34" charset="-120"/>
                         </a:rPr>
-                        <a:t>夏箫</a:t>
+                        <a:t>齐韵嘉</a:t>
                       </a:r>
                       <a:endParaRPr lang="en-US" sz="1100" dirty="0">
                         <a:latin typeface="Microsoft YaHei" charset="0"/>

--- a/公示/相关PPT/2608：计研五三新生班会-杜晋华.pptx
+++ b/公示/相关PPT/2608：计研五三新生班会-杜晋华.pptx
@@ -10141,7 +10141,7 @@
                 <a:ea typeface="Microsoft YaHei" pitchFamily="34" charset="-122"/>
                 <a:cs typeface="Microsoft YaHei" pitchFamily="34" charset="-120"/>
               </a:rPr>
-              <a:t>毕嘉仪</a:t>
+              <a:t>敬珆</a:t>
             </a:r>
             <a:endParaRPr lang="en-US" sz="1550" dirty="0"/>
           </a:p>
@@ -10180,7 +10180,7 @@
                 <a:ea typeface="Microsoft YaHei" pitchFamily="34" charset="-122"/>
                 <a:cs typeface="Microsoft YaHei" pitchFamily="34" charset="-120"/>
               </a:rPr>
-              <a:t>博士 · 冯铃</a:t>
+              <a:t>硕士 · 东昱晓</a:t>
             </a:r>
             <a:endParaRPr lang="en-US" sz="1050" dirty="0"/>
           </a:p>
@@ -10219,7 +10219,7 @@
                 <a:ea typeface="Microsoft YaHei" pitchFamily="34" charset="-122"/>
                 <a:cs typeface="Microsoft YaHei" pitchFamily="34" charset="-120"/>
               </a:rPr>
-              <a:t>来自北京；排球爱好者</a:t>
+              <a:t>江西樟树；电影听歌；LLM Agent；中共党员</a:t>
             </a:r>
             <a:endParaRPr lang="en-US" sz="1000" dirty="0"/>
           </a:p>
@@ -10310,7 +10310,7 @@
                 <a:ea typeface="Microsoft YaHei" pitchFamily="34" charset="-122"/>
                 <a:cs typeface="Microsoft YaHei" pitchFamily="34" charset="-120"/>
               </a:rPr>
-              <a:t>王浚杰</a:t>
+              <a:t>毕嘉仪</a:t>
             </a:r>
             <a:endParaRPr lang="en-US" sz="1550" dirty="0"/>
           </a:p>
@@ -10349,7 +10349,7 @@
                 <a:ea typeface="Microsoft YaHei" pitchFamily="34" charset="-122"/>
                 <a:cs typeface="Microsoft YaHei" pitchFamily="34" charset="-120"/>
               </a:rPr>
-              <a:t>硕士 · 李涓子</a:t>
+              <a:t>博士 · 冯铃</a:t>
             </a:r>
             <a:endParaRPr lang="en-US" sz="1050" dirty="0"/>
           </a:p>
@@ -10388,7 +10388,7 @@
                 <a:ea typeface="Microsoft YaHei" pitchFamily="34" charset="-122"/>
                 <a:cs typeface="Microsoft YaHei" pitchFamily="34" charset="-120"/>
               </a:rPr>
-              <a:t>来自江西；象棋；关注两年制课程规划</a:t>
+              <a:t>来自北京；排球爱好者</a:t>
             </a:r>
             <a:endParaRPr lang="en-US" sz="1000" dirty="0"/>
           </a:p>
@@ -10479,7 +10479,7 @@
                 <a:ea typeface="Microsoft YaHei" pitchFamily="34" charset="-122"/>
                 <a:cs typeface="Microsoft YaHei" pitchFamily="34" charset="-120"/>
               </a:rPr>
-              <a:t>樊静</a:t>
+              <a:t>黄峥胜</a:t>
             </a:r>
             <a:endParaRPr lang="en-US" sz="1550" dirty="0"/>
           </a:p>
@@ -10518,7 +10518,7 @@
                 <a:ea typeface="Microsoft YaHei" pitchFamily="34" charset="-122"/>
                 <a:cs typeface="Microsoft YaHei" pitchFamily="34" charset="-120"/>
               </a:rPr>
-              <a:t>领军工博 · 许斌</a:t>
+              <a:t>硕士 · 冯铃</a:t>
             </a:r>
             <a:endParaRPr lang="en-US" sz="1050" dirty="0"/>
           </a:p>
@@ -10557,7 +10557,7 @@
                 <a:ea typeface="Microsoft YaHei" pitchFamily="34" charset="-122"/>
                 <a:cs typeface="Microsoft YaHei" pitchFamily="34" charset="-120"/>
               </a:rPr>
-              <a:t>家乡安庆；爱唱歌爱交流；中共党员</a:t>
+              <a:t>来自辽宁</a:t>
             </a:r>
             <a:endParaRPr lang="en-US" sz="1000" dirty="0"/>
           </a:p>
@@ -10648,7 +10648,7 @@
                 <a:ea typeface="Microsoft YaHei" pitchFamily="34" charset="-122"/>
                 <a:cs typeface="Microsoft YaHei" pitchFamily="34" charset="-120"/>
               </a:rPr>
-              <a:t>黄峥胜</a:t>
+              <a:t>王浚杰</a:t>
             </a:r>
             <a:endParaRPr lang="en-US" sz="1550" dirty="0"/>
           </a:p>
@@ -10687,7 +10687,7 @@
                 <a:ea typeface="Microsoft YaHei" pitchFamily="34" charset="-122"/>
                 <a:cs typeface="Microsoft YaHei" pitchFamily="34" charset="-120"/>
               </a:rPr>
-              <a:t>硕士 · 冯铃</a:t>
+              <a:t>硕士 · 李涓子</a:t>
             </a:r>
             <a:endParaRPr lang="en-US" sz="1050" dirty="0"/>
           </a:p>
@@ -10726,7 +10726,7 @@
                 <a:ea typeface="Microsoft YaHei" pitchFamily="34" charset="-122"/>
                 <a:cs typeface="Microsoft YaHei" pitchFamily="34" charset="-120"/>
               </a:rPr>
-              <a:t>来自辽宁</a:t>
+              <a:t>来自江西；象棋；关注两年制课程规划</a:t>
             </a:r>
             <a:endParaRPr lang="en-US" sz="1000" dirty="0"/>
           </a:p>
@@ -10927,7 +10927,7 @@
                 <a:ea typeface="Microsoft YaHei" pitchFamily="34" charset="-122"/>
                 <a:cs typeface="Microsoft YaHei" pitchFamily="34" charset="-120"/>
               </a:rPr>
-              <a:t>王旭佳</a:t>
+              <a:t>樊静</a:t>
             </a:r>
             <a:endParaRPr lang="en-US" sz="1550" dirty="0"/>
           </a:p>
@@ -10966,7 +10966,7 @@
                 <a:ea typeface="Microsoft YaHei" pitchFamily="34" charset="-122"/>
                 <a:cs typeface="Microsoft YaHei" pitchFamily="34" charset="-120"/>
               </a:rPr>
-              <a:t>博士 · 许斌</a:t>
+              <a:t>领军工博 · 许斌</a:t>
             </a:r>
             <a:endParaRPr lang="en-US" sz="1050" dirty="0"/>
           </a:p>
@@ -11005,7 +11005,7 @@
                 <a:ea typeface="Microsoft YaHei" pitchFamily="34" charset="-122"/>
                 <a:cs typeface="Microsoft YaHei" pitchFamily="34" charset="-120"/>
               </a:rPr>
-              <a:t>来自北京；足球/音乐/唱歌；大模型后训练与推理 ▸ 文体委员</a:t>
+              <a:t>家乡安庆；爱唱歌爱交流；中共党员</a:t>
             </a:r>
             <a:endParaRPr lang="en-US" sz="1000" dirty="0"/>
           </a:p>
@@ -11096,7 +11096,7 @@
                 <a:ea typeface="Microsoft YaHei" pitchFamily="34" charset="-122"/>
                 <a:cs typeface="Microsoft YaHei" pitchFamily="34" charset="-120"/>
               </a:rPr>
-              <a:t>敬珆</a:t>
+              <a:t>王旭佳</a:t>
             </a:r>
             <a:endParaRPr lang="en-US" sz="1550" dirty="0"/>
           </a:p>
@@ -11135,7 +11135,7 @@
                 <a:ea typeface="Microsoft YaHei" pitchFamily="34" charset="-122"/>
                 <a:cs typeface="Microsoft YaHei" pitchFamily="34" charset="-120"/>
               </a:rPr>
-              <a:t>硕士 · 东昱晓</a:t>
+              <a:t>博士 · 许斌</a:t>
             </a:r>
             <a:endParaRPr lang="en-US" sz="1050" dirty="0"/>
           </a:p>
@@ -11174,7 +11174,7 @@
                 <a:ea typeface="Microsoft YaHei" pitchFamily="34" charset="-122"/>
                 <a:cs typeface="Microsoft YaHei" pitchFamily="34" charset="-120"/>
               </a:rPr>
-              <a:t>江西樟树；电影听歌；LLM Agent；中共党员</a:t>
+              <a:t>来自北京；足球/音乐/唱歌；大模型后训练与推理 ▸ 文体委员</a:t>
             </a:r>
             <a:endParaRPr lang="en-US" sz="1000" dirty="0"/>
           </a:p>
